--- a/dist/초1/수학/모양과비교/초1_수학_모양과비교_04_무게·넓이·담을수있는양비교.pptx
+++ b/dist/초1/수학/모양과비교/초1_수학_모양과비교_04_무게·넓이·담을수있는양비교.pptx
@@ -121,13 +121,13 @@
   <p:extLst>
     <p:ext uri="{521415D9-36F7-43E2-AB2F-B90AF26B5E84}">
       <p14:sectionLst xmlns:p14="http://schemas.microsoft.com/office/powerpoint/2010/main">
-        <p14:section name="도입" id="{ba557bdb-da6c-1eed-e463-339c48a9ecb7}">
+        <p14:section name="도입" id="{7130493b-9b4e-9ff6-a4b7-76829bbf41fa}">
           <p14:sldIdLst>
             <p14:sldId id="256"/>
             <p14:sldId id="257"/>
           </p14:sldIdLst>
         </p14:section>
-        <p14:section name="개념" id="{43421596-5498-ad2b-8c20-1fbd3d877ac7}">
+        <p14:section name="개념" id="{b9a3b773-cf24-70b0-f8f8-d3225fc5b007}">
           <p14:sldIdLst>
             <p14:sldId id="258"/>
             <p14:sldId id="261"/>
@@ -135,7 +135,7 @@
             <p14:sldId id="264"/>
           </p14:sldIdLst>
         </p14:section>
-        <p14:section name="연습" id="{010f8c55-68ba-d66f-e2e8-caec6bb0b4f3}">
+        <p14:section name="연습" id="{8a5e28d5-322b-8fcf-53d5-816fcde0e5eb}">
           <p14:sldIdLst>
             <p14:sldId id="259"/>
             <p14:sldId id="260"/>
@@ -143,31 +143,31 @@
             <p14:sldId id="265"/>
           </p14:sldIdLst>
         </p14:section>
-        <p14:section name="개념" id="{b9c1e635-c5fb-d81c-828f-59ef3627f2b6}">
+        <p14:section name="개념" id="{3d4b5394-90bb-c740-001f-627a37fc9ac6}">
           <p14:sldIdLst/>
         </p14:section>
-        <p14:section name="연습" id="{b44e96f2-daf1-3ed3-e7b4-4e05ff6282da}">
+        <p14:section name="연습" id="{077f61fe-f6f1-dd31-39d9-eb415f0c8bea}">
           <p14:sldIdLst/>
         </p14:section>
-        <p14:section name="개념" id="{495a6610-2d25-442b-fab1-bb5576460b50}">
+        <p14:section name="개념" id="{8b0bf8bc-a203-67dd-9bec-c6db39847ed9}">
           <p14:sldIdLst/>
         </p14:section>
-        <p14:section name="연습" id="{939c4663-7143-45c6-01f6-f59d0c70de06}">
+        <p14:section name="연습" id="{52b39ec3-5a3a-bc2d-b532-d2d576600838}">
           <p14:sldIdLst/>
         </p14:section>
-        <p14:section name="확인" id="{9f4a1839-3755-9bae-280c-0324cb98d7ff}">
+        <p14:section name="확인" id="{7d5de8c8-dc0a-c1d8-f07b-e5d58f1311e1}">
           <p14:sldIdLst>
             <p14:sldId id="266"/>
             <p14:sldId id="267"/>
             <p14:sldId id="268"/>
           </p14:sldIdLst>
         </p14:section>
-        <p14:section name="정리" id="{31573de1-020d-aaa4-4c62-28915be0f817}">
+        <p14:section name="정리" id="{b95cd824-1e8c-72af-411b-3e57baefc8f7}">
           <p14:sldIdLst>
             <p14:sldId id="269"/>
           </p14:sldIdLst>
         </p14:section>
-        <p14:section name="보충" id="{03e14c2b-8519-f1da-708a-a382c99f6300}">
+        <p14:section name="보충" id="{40f733a2-1f41-bd80-69f5-5ff8619834ae}">
           <p14:sldIdLst>
             <p14:sldId id="270"/>
           </p14:sldIdLst>
@@ -3391,7 +3391,7 @@
                 <a:ea typeface="맑은 고딕" pitchFamily="34" charset="-122"/>
                 <a:cs typeface="맑은 고딕" pitchFamily="34" charset="-120"/>
               </a:rPr>
-              <a:t>어느 컵에 더 많이 담길까요?</a:t>
+              <a:t>더 많이 담기는 컵은?</a:t>
             </a:r>
             <a:endParaRPr lang="ko-KR" sz="4400" dirty="0"/>
           </a:p>

--- a/dist/초1/수학/모양과비교/초1_수학_모양과비교_04_무게·넓이·담을수있는양비교.pptx
+++ b/dist/초1/수학/모양과비교/초1_수학_모양과비교_04_무게·넓이·담을수있는양비교.pptx
@@ -121,13 +121,13 @@
   <p:extLst>
     <p:ext uri="{521415D9-36F7-43E2-AB2F-B90AF26B5E84}">
       <p14:sectionLst xmlns:p14="http://schemas.microsoft.com/office/powerpoint/2010/main">
-        <p14:section name="도입" id="{7130493b-9b4e-9ff6-a4b7-76829bbf41fa}">
+        <p14:section name="도입" id="{9a226832-1cde-9c62-73ee-219e6c6a1d83}">
           <p14:sldIdLst>
             <p14:sldId id="256"/>
             <p14:sldId id="257"/>
           </p14:sldIdLst>
         </p14:section>
-        <p14:section name="개념" id="{b9a3b773-cf24-70b0-f8f8-d3225fc5b007}">
+        <p14:section name="개념" id="{5978c171-27dc-6f4f-e059-c0cab3565fb6}">
           <p14:sldIdLst>
             <p14:sldId id="258"/>
             <p14:sldId id="261"/>
@@ -135,7 +135,7 @@
             <p14:sldId id="264"/>
           </p14:sldIdLst>
         </p14:section>
-        <p14:section name="연습" id="{8a5e28d5-322b-8fcf-53d5-816fcde0e5eb}">
+        <p14:section name="연습" id="{125bbc5f-e5bb-03ce-db5e-ebd4ef3c1ea4}">
           <p14:sldIdLst>
             <p14:sldId id="259"/>
             <p14:sldId id="260"/>
@@ -143,31 +143,31 @@
             <p14:sldId id="265"/>
           </p14:sldIdLst>
         </p14:section>
-        <p14:section name="개념" id="{3d4b5394-90bb-c740-001f-627a37fc9ac6}">
+        <p14:section name="개념" id="{05cc5dde-8193-ec5c-511e-87e461d744c0}">
           <p14:sldIdLst/>
         </p14:section>
-        <p14:section name="연습" id="{077f61fe-f6f1-dd31-39d9-eb415f0c8bea}">
+        <p14:section name="연습" id="{1d68febe-0a71-69ef-6591-448a89b6403d}">
           <p14:sldIdLst/>
         </p14:section>
-        <p14:section name="개념" id="{8b0bf8bc-a203-67dd-9bec-c6db39847ed9}">
+        <p14:section name="개념" id="{cf786a31-4c6d-5bd8-e523-088624575230}">
           <p14:sldIdLst/>
         </p14:section>
-        <p14:section name="연습" id="{52b39ec3-5a3a-bc2d-b532-d2d576600838}">
+        <p14:section name="연습" id="{361abf4d-91b0-9a1b-99a0-606164e6bc01}">
           <p14:sldIdLst/>
         </p14:section>
-        <p14:section name="확인" id="{7d5de8c8-dc0a-c1d8-f07b-e5d58f1311e1}">
+        <p14:section name="확인" id="{ef624124-4e34-bb3a-4325-5ff5df3f5d16}">
           <p14:sldIdLst>
             <p14:sldId id="266"/>
             <p14:sldId id="267"/>
             <p14:sldId id="268"/>
           </p14:sldIdLst>
         </p14:section>
-        <p14:section name="정리" id="{b95cd824-1e8c-72af-411b-3e57baefc8f7}">
+        <p14:section name="정리" id="{692d59ff-0cd6-d672-c878-abb455614ebf}">
           <p14:sldIdLst>
             <p14:sldId id="269"/>
           </p14:sldIdLst>
         </p14:section>
-        <p14:section name="보충" id="{40f733a2-1f41-bd80-69f5-5ff8619834ae}">
+        <p14:section name="보충" id="{54139bb4-ba04-2b8d-21e1-c9e200e60ba6}">
           <p14:sldIdLst>
             <p14:sldId id="270"/>
           </p14:sldIdLst>

--- a/dist/초1/수학/모양과비교/초1_수학_모양과비교_04_무게·넓이·담을수있는양비교.pptx
+++ b/dist/초1/수학/모양과비교/초1_수학_모양과비교_04_무게·넓이·담을수있는양비교.pptx
@@ -121,13 +121,13 @@
   <p:extLst>
     <p:ext uri="{521415D9-36F7-43E2-AB2F-B90AF26B5E84}">
       <p14:sectionLst xmlns:p14="http://schemas.microsoft.com/office/powerpoint/2010/main">
-        <p14:section name="도입" id="{9a226832-1cde-9c62-73ee-219e6c6a1d83}">
+        <p14:section name="도입" id="{21ef0546-6f1d-adce-1cfd-bbbf84451ba0}">
           <p14:sldIdLst>
             <p14:sldId id="256"/>
             <p14:sldId id="257"/>
           </p14:sldIdLst>
         </p14:section>
-        <p14:section name="개념" id="{5978c171-27dc-6f4f-e059-c0cab3565fb6}">
+        <p14:section name="개념" id="{6d8b133b-1d7e-7123-25b0-bc694a4c9172}">
           <p14:sldIdLst>
             <p14:sldId id="258"/>
             <p14:sldId id="261"/>
@@ -135,7 +135,7 @@
             <p14:sldId id="264"/>
           </p14:sldIdLst>
         </p14:section>
-        <p14:section name="연습" id="{125bbc5f-e5bb-03ce-db5e-ebd4ef3c1ea4}">
+        <p14:section name="연습" id="{98807454-8c29-a183-2165-50d3bb78b032}">
           <p14:sldIdLst>
             <p14:sldId id="259"/>
             <p14:sldId id="260"/>
@@ -143,31 +143,31 @@
             <p14:sldId id="265"/>
           </p14:sldIdLst>
         </p14:section>
-        <p14:section name="개념" id="{05cc5dde-8193-ec5c-511e-87e461d744c0}">
+        <p14:section name="개념" id="{4a2bdee6-353e-4286-5be2-e1f5f3e77e60}">
           <p14:sldIdLst/>
         </p14:section>
-        <p14:section name="연습" id="{1d68febe-0a71-69ef-6591-448a89b6403d}">
+        <p14:section name="연습" id="{97c0566a-c766-dd1e-aa01-f31461538d50}">
           <p14:sldIdLst/>
         </p14:section>
-        <p14:section name="개념" id="{cf786a31-4c6d-5bd8-e523-088624575230}">
+        <p14:section name="개념" id="{6879695e-a330-1a2c-45cb-262e3e605ae3}">
           <p14:sldIdLst/>
         </p14:section>
-        <p14:section name="연습" id="{361abf4d-91b0-9a1b-99a0-606164e6bc01}">
+        <p14:section name="연습" id="{26103532-b832-1351-dcef-40b398a62956}">
           <p14:sldIdLst/>
         </p14:section>
-        <p14:section name="확인" id="{ef624124-4e34-bb3a-4325-5ff5df3f5d16}">
+        <p14:section name="확인" id="{4ac00adf-1438-ff2a-39c9-bac74de14930}">
           <p14:sldIdLst>
             <p14:sldId id="266"/>
             <p14:sldId id="267"/>
             <p14:sldId id="268"/>
           </p14:sldIdLst>
         </p14:section>
-        <p14:section name="정리" id="{692d59ff-0cd6-d672-c878-abb455614ebf}">
+        <p14:section name="정리" id="{c911a863-3e8e-2955-e256-13ec2978f3e7}">
           <p14:sldIdLst>
             <p14:sldId id="269"/>
           </p14:sldIdLst>
         </p14:section>
-        <p14:section name="보충" id="{54139bb4-ba04-2b8d-21e1-c9e200e60ba6}">
+        <p14:section name="보충" id="{7cdaae6a-ccd8-a4e2-7fa3-6c799c4c966c}">
           <p14:sldIdLst>
             <p14:sldId id="270"/>
           </p14:sldIdLst>
